--- a/研一上/高级统计学/7.3非线性SVM_五小节优化版.pptx
+++ b/研一上/高级统计学/7.3非线性SVM_五小节优化版.pptx
@@ -8,28 +8,31 @@
     <p:notesMasterId r:id="rId4"/>
   </p:notesMasterIdLst>
   <p:sldIdLst>
-    <p:sldId id="256" r:id="rId7"/>
-    <p:sldId id="257" r:id="rId8"/>
-    <p:sldId id="258" r:id="rId9"/>
-    <p:sldId id="259" r:id="rId6"/>
-    <p:sldId id="260" r:id="rId5"/>
-    <p:sldId id="261" r:id="rId3"/>
-    <p:sldId id="262" r:id="rId13"/>
-    <p:sldId id="263" r:id="rId14"/>
-    <p:sldId id="264" r:id="rId15"/>
-    <p:sldId id="265" r:id="rId16"/>
-    <p:sldId id="266" r:id="rId17"/>
-    <p:sldId id="267" r:id="rId18"/>
-    <p:sldId id="268" r:id="rId19"/>
-    <p:sldId id="269" r:id="rId20"/>
-    <p:sldId id="270" r:id="rId21"/>
-    <p:sldId id="271" r:id="rId22"/>
-    <p:sldId id="272" r:id="rId23"/>
-    <p:sldId id="273" r:id="rId24"/>
-    <p:sldId id="274" r:id="rId25"/>
-    <p:sldId id="275" r:id="rId26"/>
-    <p:sldId id="276" r:id="rId27"/>
-    <p:sldId id="277" r:id="rId28"/>
+    <p:sldId id="256" r:id="rId29"/>
+    <p:sldId id="257" r:id="rId30"/>
+    <p:sldId id="258" r:id="rId7"/>
+    <p:sldId id="259" r:id="rId8"/>
+    <p:sldId id="260" r:id="rId9"/>
+    <p:sldId id="261" r:id="rId6"/>
+    <p:sldId id="262" r:id="rId5"/>
+    <p:sldId id="263" r:id="rId3"/>
+    <p:sldId id="264" r:id="rId13"/>
+    <p:sldId id="265" r:id="rId14"/>
+    <p:sldId id="266" r:id="rId15"/>
+    <p:sldId id="267" r:id="rId16"/>
+    <p:sldId id="268" r:id="rId17"/>
+    <p:sldId id="269" r:id="rId18"/>
+    <p:sldId id="270" r:id="rId19"/>
+    <p:sldId id="271" r:id="rId20"/>
+    <p:sldId id="272" r:id="rId21"/>
+    <p:sldId id="273" r:id="rId22"/>
+    <p:sldId id="274" r:id="rId23"/>
+    <p:sldId id="275" r:id="rId24"/>
+    <p:sldId id="276" r:id="rId25"/>
+    <p:sldId id="277" r:id="rId26"/>
+    <p:sldId id="278" r:id="rId27"/>
+    <p:sldId id="279" r:id="rId28"/>
+    <p:sldId id="280" r:id="rId31"/>
   </p:sldIdLst>
   <p:sldSz cx="14630400" cy="8229600" type="screen4x3"/>
   <p:notesSz cx="6858000" cy="9144000"/>
@@ -1760,6 +1763,216 @@
           <a:p>
             <a:r>
               <a:t>教师收集错误最多的一题，下一次课前用对应反例复习；不要以全班齐声回答代替个体理解检查。</a:t>
+            </a:r>
+          </a:p>
+        </p:txBody>
+      </p:sp>
+      <p:sp>
+        <p:nvSpPr>
+          <p:cNvPr id="4" name="Slide Number Placeholder 3"/>
+          <p:cNvSpPr>
+            <a:spLocks noGrp="1"/>
+          </p:cNvSpPr>
+          <p:nvPr>
+            <p:ph type="sldNum" idx="5" sz="quarter"/>
+          </p:nvPr>
+        </p:nvSpPr>
+        <p:spPr/>
+      </p:sp>
+    </p:spTree>
+  </p:cSld>
+  <p:clrMapOvr>
+    <a:masterClrMapping/>
+  </p:clrMapOvr>
+</p:notes>
+</file>
+
+<file path=ppt/notesSlides/notesSlide23.xml><?xml version="1.0" encoding="utf-8"?>
+<p:notes xmlns:a="http://schemas.openxmlformats.org/drawingml/2006/main" xmlns:p="http://schemas.openxmlformats.org/presentationml/2006/main" xmlns:r="http://schemas.openxmlformats.org/officeDocument/2006/relationships">
+  <p:cSld>
+    <p:spTree>
+      <p:nvGrpSpPr>
+        <p:cNvPr id="1" name=""/>
+        <p:cNvGrpSpPr/>
+        <p:nvPr/>
+      </p:nvGrpSpPr>
+      <p:grpSpPr>
+        <a:xfrm>
+          <a:off x="0" y="0"/>
+          <a:ext cx="0" cy="0"/>
+          <a:chOff x="0" y="0"/>
+          <a:chExt cx="0" cy="0"/>
+        </a:xfrm>
+      </p:grpSpPr>
+      <p:sp>
+        <p:nvSpPr>
+          <p:cNvPr id="2" name="Slide Image Placeholder 1"/>
+          <p:cNvSpPr>
+            <a:spLocks noGrp="1"/>
+          </p:cNvSpPr>
+          <p:nvPr>
+            <p:ph type="sldImg" idx="2"/>
+          </p:nvPr>
+        </p:nvSpPr>
+        <p:spPr/>
+      </p:sp>
+      <p:sp>
+        <p:nvSpPr>
+          <p:cNvPr id="3" name="Notes Placeholder 2"/>
+          <p:cNvSpPr>
+            <a:spLocks noGrp="1"/>
+          </p:cNvSpPr>
+          <p:nvPr>
+            <p:ph type="body" idx="3" sz="quarter"/>
+          </p:nvPr>
+        </p:nvSpPr>
+        <p:spPr/>
+        <p:txBody>
+          <a:bodyPr/>
+          <a:lstStyle/>
+          <a:p>
+            <a:r>
+              <a:t>同学们，今天学习非线性支持向量机中的核函数与核技巧。我们先用四个点构成的 XOR 例子看看直线为什么失效，再沿着五个小节学习如何改变特征表示。请带着三个问题听课：核函数计算什么，为什么它必须满足数学条件，以及核参数怎样影响模型。封面约用二十秒，不急于讲公式。</a:t>
+            </a:r>
+          </a:p>
+        </p:txBody>
+      </p:sp>
+      <p:sp>
+        <p:nvSpPr>
+          <p:cNvPr id="4" name="Slide Number Placeholder 3"/>
+          <p:cNvSpPr>
+            <a:spLocks noGrp="1"/>
+          </p:cNvSpPr>
+          <p:nvPr>
+            <p:ph type="sldNum" idx="5" sz="quarter"/>
+          </p:nvPr>
+        </p:nvSpPr>
+        <p:spPr/>
+      </p:sp>
+    </p:spTree>
+  </p:cSld>
+  <p:clrMapOvr>
+    <a:masterClrMapping/>
+  </p:clrMapOvr>
+</p:notes>
+</file>
+
+<file path=ppt/notesSlides/notesSlide24.xml><?xml version="1.0" encoding="utf-8"?>
+<p:notes xmlns:a="http://schemas.openxmlformats.org/drawingml/2006/main" xmlns:p="http://schemas.openxmlformats.org/presentationml/2006/main" xmlns:r="http://schemas.openxmlformats.org/officeDocument/2006/relationships">
+  <p:cSld>
+    <p:spTree>
+      <p:nvGrpSpPr>
+        <p:cNvPr id="1" name=""/>
+        <p:cNvGrpSpPr/>
+        <p:nvPr/>
+      </p:nvGrpSpPr>
+      <p:grpSpPr>
+        <a:xfrm>
+          <a:off x="0" y="0"/>
+          <a:ext cx="0" cy="0"/>
+          <a:chOff x="0" y="0"/>
+          <a:chExt cx="0" cy="0"/>
+        </a:xfrm>
+      </p:grpSpPr>
+      <p:sp>
+        <p:nvSpPr>
+          <p:cNvPr id="2" name="Slide Image Placeholder 1"/>
+          <p:cNvSpPr>
+            <a:spLocks noGrp="1"/>
+          </p:cNvSpPr>
+          <p:nvPr>
+            <p:ph type="sldImg" idx="2"/>
+          </p:nvPr>
+        </p:nvSpPr>
+        <p:spPr/>
+      </p:sp>
+      <p:sp>
+        <p:nvSpPr>
+          <p:cNvPr id="3" name="Notes Placeholder 2"/>
+          <p:cNvSpPr>
+            <a:spLocks noGrp="1"/>
+          </p:cNvSpPr>
+          <p:nvPr>
+            <p:ph type="body" idx="3" sz="quarter"/>
+          </p:nvPr>
+        </p:nvSpPr>
+        <p:spPr/>
+        <p:txBody>
+          <a:bodyPr/>
+          <a:lstStyle/>
+          <a:p>
+            <a:r>
+              <a:t>这张目录给出今天的学习路线。第一步从 XOR 找到线性表示的限制，第二步用核技巧直接计算特征内积；第三步讨论对称半正定条件，避免把任意相似度误当成合法核；第四、第五步分别学习多项式核与高斯核。随后把核函数放回 SVM 的训练和预测流程，最后完成检测与小结。我们依次回答为什么需要、怎样计算、何时合法、如何选择这四个问题。</a:t>
+            </a:r>
+          </a:p>
+        </p:txBody>
+      </p:sp>
+      <p:sp>
+        <p:nvSpPr>
+          <p:cNvPr id="4" name="Slide Number Placeholder 3"/>
+          <p:cNvSpPr>
+            <a:spLocks noGrp="1"/>
+          </p:cNvSpPr>
+          <p:nvPr>
+            <p:ph type="sldNum" idx="5" sz="quarter"/>
+          </p:nvPr>
+        </p:nvSpPr>
+        <p:spPr/>
+      </p:sp>
+    </p:spTree>
+  </p:cSld>
+  <p:clrMapOvr>
+    <a:masterClrMapping/>
+  </p:clrMapOvr>
+</p:notes>
+</file>
+
+<file path=ppt/notesSlides/notesSlide25.xml><?xml version="1.0" encoding="utf-8"?>
+<p:notes xmlns:a="http://schemas.openxmlformats.org/drawingml/2006/main" xmlns:p="http://schemas.openxmlformats.org/presentationml/2006/main" xmlns:r="http://schemas.openxmlformats.org/officeDocument/2006/relationships">
+  <p:cSld>
+    <p:spTree>
+      <p:nvGrpSpPr>
+        <p:cNvPr id="1" name=""/>
+        <p:cNvGrpSpPr/>
+        <p:nvPr/>
+      </p:nvGrpSpPr>
+      <p:grpSpPr>
+        <a:xfrm>
+          <a:off x="0" y="0"/>
+          <a:ext cx="0" cy="0"/>
+          <a:chOff x="0" y="0"/>
+          <a:chExt cx="0" cy="0"/>
+        </a:xfrm>
+      </p:grpSpPr>
+      <p:sp>
+        <p:nvSpPr>
+          <p:cNvPr id="2" name="Slide Image Placeholder 1"/>
+          <p:cNvSpPr>
+            <a:spLocks noGrp="1"/>
+          </p:cNvSpPr>
+          <p:nvPr>
+            <p:ph type="sldImg" idx="2"/>
+          </p:nvPr>
+        </p:nvSpPr>
+        <p:spPr/>
+      </p:sp>
+      <p:sp>
+        <p:nvSpPr>
+          <p:cNvPr id="3" name="Notes Placeholder 2"/>
+          <p:cNvSpPr>
+            <a:spLocks noGrp="1"/>
+          </p:cNvSpPr>
+          <p:nvPr>
+            <p:ph type="body" idx="3" sz="quarter"/>
+          </p:nvPr>
+        </p:nvSpPr>
+        <p:spPr/>
+        <p:txBody>
+          <a:bodyPr/>
+          <a:lstStyle/>
+          <a:p>
+            <a:r>
+              <a:t>最后请把今天的内容连成一条链。XOR 告诉我们，先要有足够的特征表示能力；核技巧告诉我们，可以只计算特征空间内积而不显式展开；对称半正定条件保证这种内积解释合法。多项式核提供有限阶交互，高斯核对应通常无限维的特征表示。SVM 再在特征空间中优化间隔，预测时计算与支持向量的核值。实践中要在训练折内标准化并交叉验证，不能凭训练准确率判断泛化。请大家课后独立完成三件事：展开二次核并解释根号二系数；说明 gamma 与 sigma 的反向关系；用一个二次型为负的例子否定候选矩阵的半正定性。</a:t>
             </a:r>
           </a:p>
         </p:txBody>
@@ -5856,7 +6069,7 @@
               <a:rPr>
                 <a:ea typeface="微软雅黑" panose="020B0503020204020204" charset="-122"/>
               </a:rPr>
-              <a:t>01 / 22</a:t>
+              <a:t>03 / 25</a:t>
             </a:r>
             <a:endParaRPr>
               <a:ea typeface="微软雅黑" panose="020B0503020204020204" charset="-122"/>
@@ -6414,7 +6627,7 @@
               <a:rPr>
                 <a:ea typeface="微软雅黑" panose="020B0503020204020204" charset="-122"/>
               </a:rPr>
-              <a:t>10 / 22</a:t>
+              <a:t>12 / 25</a:t>
             </a:r>
             <a:endParaRPr>
               <a:ea typeface="微软雅黑" panose="020B0503020204020204" charset="-122"/>
@@ -6972,7 +7185,7 @@
               <a:rPr>
                 <a:ea typeface="微软雅黑" panose="020B0503020204020204" charset="-122"/>
               </a:rPr>
-              <a:t>11 / 22</a:t>
+              <a:t>13 / 25</a:t>
             </a:r>
             <a:endParaRPr>
               <a:ea typeface="微软雅黑" panose="020B0503020204020204" charset="-122"/>
@@ -7530,7 +7743,7 @@
               <a:rPr>
                 <a:ea typeface="微软雅黑" panose="020B0503020204020204" charset="-122"/>
               </a:rPr>
-              <a:t>12 / 22</a:t>
+              <a:t>14 / 25</a:t>
             </a:r>
             <a:endParaRPr>
               <a:ea typeface="微软雅黑" panose="020B0503020204020204" charset="-122"/>
@@ -8088,7 +8301,7 @@
               <a:rPr>
                 <a:ea typeface="微软雅黑" panose="020B0503020204020204" charset="-122"/>
               </a:rPr>
-              <a:t>13 / 22</a:t>
+              <a:t>15 / 25</a:t>
             </a:r>
             <a:endParaRPr>
               <a:ea typeface="微软雅黑" panose="020B0503020204020204" charset="-122"/>
@@ -8524,7 +8737,7 @@
               <a:rPr>
                 <a:ea typeface="微软雅黑" panose="020B0503020204020204" charset="-122"/>
               </a:rPr>
-              <a:t>14 / 22</a:t>
+              <a:t>16 / 25</a:t>
             </a:r>
             <a:endParaRPr>
               <a:ea typeface="微软雅黑" panose="020B0503020204020204" charset="-122"/>
@@ -9082,7 +9295,7 @@
               <a:rPr>
                 <a:ea typeface="微软雅黑" panose="020B0503020204020204" charset="-122"/>
               </a:rPr>
-              <a:t>15 / 22</a:t>
+              <a:t>17 / 25</a:t>
             </a:r>
             <a:endParaRPr>
               <a:ea typeface="微软雅黑" panose="020B0503020204020204" charset="-122"/>
@@ -9640,7 +9853,7 @@
               <a:rPr>
                 <a:ea typeface="微软雅黑" panose="020B0503020204020204" charset="-122"/>
               </a:rPr>
-              <a:t>16 / 22</a:t>
+              <a:t>18 / 25</a:t>
             </a:r>
             <a:endParaRPr>
               <a:ea typeface="微软雅黑" panose="020B0503020204020204" charset="-122"/>
@@ -10198,7 +10411,7 @@
               <a:rPr>
                 <a:ea typeface="微软雅黑" panose="020B0503020204020204" charset="-122"/>
               </a:rPr>
-              <a:t>17 / 22</a:t>
+              <a:t>19 / 25</a:t>
             </a:r>
             <a:endParaRPr>
               <a:ea typeface="微软雅黑" panose="020B0503020204020204" charset="-122"/>
@@ -10756,7 +10969,7 @@
               <a:rPr>
                 <a:ea typeface="微软雅黑" panose="020B0503020204020204" charset="-122"/>
               </a:rPr>
-              <a:t>18 / 22</a:t>
+              <a:t>20 / 25</a:t>
             </a:r>
             <a:endParaRPr>
               <a:ea typeface="微软雅黑" panose="020B0503020204020204" charset="-122"/>
@@ -11026,7 +11239,7 @@
               <a:rPr>
                 <a:ea typeface="微软雅黑" panose="020B0503020204020204" charset="-122"/>
               </a:rPr>
-              <a:t>19 / 22</a:t>
+              <a:t>21 / 25</a:t>
             </a:r>
             <a:endParaRPr>
               <a:ea typeface="微软雅黑" panose="020B0503020204020204" charset="-122"/>
@@ -18318,7 +18531,7 @@
               <a:rPr>
                 <a:ea typeface="微软雅黑" panose="020B0503020204020204" charset="-122"/>
               </a:rPr>
-              <a:t>02 / 22</a:t>
+              <a:t>04 / 25</a:t>
             </a:r>
             <a:endParaRPr>
               <a:ea typeface="微软雅黑" panose="020B0503020204020204" charset="-122"/>
@@ -20562,7 +20775,7 @@
               <a:rPr>
                 <a:ea typeface="微软雅黑" panose="020B0503020204020204" charset="-122"/>
               </a:rPr>
-              <a:t>20 / 22</a:t>
+              <a:t>22 / 25</a:t>
             </a:r>
             <a:endParaRPr>
               <a:ea typeface="微软雅黑" panose="020B0503020204020204" charset="-122"/>
@@ -21120,7 +21333,7 @@
               <a:rPr>
                 <a:ea typeface="微软雅黑" panose="020B0503020204020204" charset="-122"/>
               </a:rPr>
-              <a:t>21 / 22</a:t>
+              <a:t>23 / 25</a:t>
             </a:r>
             <a:endParaRPr>
               <a:ea typeface="微软雅黑" panose="020B0503020204020204" charset="-122"/>
@@ -21678,11 +21891,2064 @@
               <a:rPr>
                 <a:ea typeface="微软雅黑" panose="020B0503020204020204" charset="-122"/>
               </a:rPr>
-              <a:t>22 / 22</a:t>
+              <a:t>24 / 25</a:t>
             </a:r>
             <a:endParaRPr>
               <a:ea typeface="微软雅黑" panose="020B0503020204020204" charset="-122"/>
             </a:endParaRPr>
+          </a:p>
+        </p:txBody>
+      </p:sp>
+    </p:spTree>
+  </p:cSld>
+  <p:clrMapOvr>
+    <a:masterClrMapping/>
+  </p:clrMapOvr>
+</p:sld>
+</file>
+
+<file path=ppt/slides/slide23.xml><?xml version="1.0" encoding="utf-8"?>
+<p:sld xmlns:a="http://schemas.openxmlformats.org/drawingml/2006/main" xmlns:p="http://schemas.openxmlformats.org/presentationml/2006/main" xmlns:r="http://schemas.openxmlformats.org/officeDocument/2006/relationships">
+  <p:cSld>
+    <p:bg>
+      <p:bgPr>
+        <a:solidFill>
+          <a:srgbClr val="FFFFFF"/>
+        </a:solidFill>
+        <a:effectLst/>
+      </p:bgPr>
+    </p:bg>
+    <p:spTree>
+      <p:nvGrpSpPr>
+        <p:cNvPr id="1" name=""/>
+        <p:cNvGrpSpPr/>
+        <p:nvPr/>
+      </p:nvGrpSpPr>
+      <p:grpSpPr/>
+      <p:sp>
+        <p:nvSpPr>
+          <p:cNvPr id="2" name="Rectangle 1"/>
+          <p:cNvSpPr/>
+          <p:nvPr/>
+        </p:nvSpPr>
+        <p:spPr>
+          <a:xfrm>
+            <a:off x="0" y="0"/>
+            <a:ext cx="14630400" cy="128016"/>
+          </a:xfrm>
+          <a:prstGeom prst="rect">
+            <a:avLst/>
+          </a:prstGeom>
+          <a:solidFill>
+            <a:srgbClr val="142F50"/>
+          </a:solidFill>
+          <a:ln>
+            <a:noFill/>
+          </a:ln>
+        </p:spPr>
+        <p:txBody>
+          <a:bodyPr rtlCol="0" anchor="ctr"/>
+          <a:lstStyle/>
+          <a:p>
+            <a:pPr algn="ctr"/>
+          </a:p>
+        </p:txBody>
+      </p:sp>
+      <p:cxnSp>
+        <p:nvCxnSpPr>
+          <p:cNvPr id="3" name="Connector 5"/>
+          <p:cNvCxnSpPr/>
+          <p:nvPr/>
+        </p:nvCxnSpPr>
+        <p:spPr>
+          <a:xfrm>
+            <a:off x="548640" y="987552"/>
+            <a:ext cx="13533120" cy="0"/>
+          </a:xfrm>
+          <a:prstGeom prst="line">
+            <a:avLst/>
+          </a:prstGeom>
+          <a:ln w="12700">
+            <a:solidFill>
+              <a:srgbClr val="DFE7EF"/>
+            </a:solidFill>
+          </a:ln>
+        </p:spPr>
+        <p:style>
+          <a:lnRef idx="2">
+            <a:schemeClr val="accent1"/>
+          </a:lnRef>
+          <a:fillRef idx="0">
+            <a:schemeClr val="accent1"/>
+          </a:fillRef>
+          <a:effectRef idx="1">
+            <a:schemeClr val="accent1"/>
+          </a:effectRef>
+          <a:fontRef idx="minor">
+            <a:schemeClr val="tx1"/>
+          </a:fontRef>
+        </p:style>
+      </p:cxnSp>
+      <p:sp>
+        <p:nvSpPr>
+          <p:cNvPr id="4" name="TextBox 3"/>
+          <p:cNvSpPr txBox="1"/>
+          <p:nvPr/>
+        </p:nvSpPr>
+        <p:spPr>
+          <a:xfrm>
+            <a:off x="594360" y="301752"/>
+            <a:ext cx="13441680" cy="548640"/>
+          </a:xfrm>
+          <a:prstGeom prst="rect">
+            <a:avLst/>
+          </a:prstGeom>
+          <a:noFill/>
+        </p:spPr>
+        <p:txBody>
+          <a:bodyPr wrap="square">
+            <a:spAutoFit/>
+          </a:bodyPr>
+          <a:lstStyle/>
+          <a:p>
+            <a:pPr>
+              <a:spcAft>
+                <a:spcPts val="1400"/>
+              </a:spcAft>
+              <a:defRPr sz="3000" b="1">
+                <a:solidFill>
+                  <a:srgbClr val="142F50"/>
+                </a:solidFill>
+                <a:latin typeface="Noto Sans CJK SC"/>
+              </a:defRPr>
+            </a:pPr>
+            <a:r>
+              <a:rPr>
+                <a:ea typeface="Noto Sans CJK SC"/>
+              </a:rPr>
+              <a:t>高级统计学</a:t>
+            </a:r>
+          </a:p>
+        </p:txBody>
+      </p:sp>
+      <p:sp>
+        <p:nvSpPr>
+          <p:cNvPr id="5" name="TextBox 4"/>
+          <p:cNvSpPr txBox="1"/>
+          <p:nvPr/>
+        </p:nvSpPr>
+        <p:spPr>
+          <a:xfrm>
+            <a:off x="914400" y="1828800"/>
+            <a:ext cx="12801600" cy="914400"/>
+          </a:xfrm>
+          <a:prstGeom prst="rect">
+            <a:avLst/>
+          </a:prstGeom>
+          <a:noFill/>
+        </p:spPr>
+        <p:txBody>
+          <a:bodyPr wrap="square">
+            <a:spAutoFit/>
+          </a:bodyPr>
+          <a:lstStyle/>
+          <a:p>
+            <a:pPr>
+              <a:spcAft>
+                <a:spcPts val="1400"/>
+              </a:spcAft>
+              <a:defRPr sz="4300" b="1">
+                <a:solidFill>
+                  <a:srgbClr val="142F50"/>
+                </a:solidFill>
+                <a:latin typeface="Noto Sans CJK SC"/>
+              </a:defRPr>
+            </a:pPr>
+            <a:r>
+              <a:rPr>
+                <a:ea typeface="Noto Sans CJK SC"/>
+              </a:rPr>
+              <a:t>7.3  非线性支持向量机</a:t>
+            </a:r>
+          </a:p>
+        </p:txBody>
+      </p:sp>
+      <p:sp>
+        <p:nvSpPr>
+          <p:cNvPr id="6" name="TextBox 5"/>
+          <p:cNvSpPr txBox="1"/>
+          <p:nvPr/>
+        </p:nvSpPr>
+        <p:spPr>
+          <a:xfrm>
+            <a:off x="914400" y="3063240"/>
+            <a:ext cx="12801600" cy="731520"/>
+          </a:xfrm>
+          <a:prstGeom prst="rect">
+            <a:avLst/>
+          </a:prstGeom>
+          <a:noFill/>
+        </p:spPr>
+        <p:txBody>
+          <a:bodyPr wrap="square">
+            <a:spAutoFit/>
+          </a:bodyPr>
+          <a:lstStyle/>
+          <a:p>
+            <a:pPr>
+              <a:spcAft>
+                <a:spcPts val="1400"/>
+              </a:spcAft>
+              <a:defRPr sz="3400" b="1">
+                <a:solidFill>
+                  <a:srgbClr val="142F50"/>
+                </a:solidFill>
+                <a:latin typeface="Noto Sans CJK SC"/>
+              </a:defRPr>
+            </a:pPr>
+            <a:r>
+              <a:rPr>
+                <a:ea typeface="Noto Sans CJK SC"/>
+              </a:rPr>
+              <a:t>核函数与核技巧</a:t>
+            </a:r>
+          </a:p>
+        </p:txBody>
+      </p:sp>
+      <p:sp>
+        <p:nvSpPr>
+          <p:cNvPr id="7" name="TextBox 6"/>
+          <p:cNvSpPr txBox="1"/>
+          <p:nvPr/>
+        </p:nvSpPr>
+        <p:spPr>
+          <a:xfrm>
+            <a:off x="914400" y="4206240"/>
+            <a:ext cx="12801600" cy="731520"/>
+          </a:xfrm>
+          <a:prstGeom prst="rect">
+            <a:avLst/>
+          </a:prstGeom>
+          <a:noFill/>
+        </p:spPr>
+        <p:txBody>
+          <a:bodyPr wrap="square">
+            <a:spAutoFit/>
+          </a:bodyPr>
+          <a:lstStyle/>
+          <a:p>
+            <a:pPr>
+              <a:spcAft>
+                <a:spcPts val="1400"/>
+              </a:spcAft>
+              <a:defRPr sz="2500" b="0">
+                <a:solidFill>
+                  <a:srgbClr val="243A50"/>
+                </a:solidFill>
+                <a:latin typeface="Noto Sans CJK SC"/>
+              </a:defRPr>
+            </a:pPr>
+            <a:r>
+              <a:rPr>
+                <a:ea typeface="Noto Sans CJK SC"/>
+              </a:rPr>
+              <a:t>从 XOR 出发，理解高维表示、合法核与分类决策</a:t>
+            </a:r>
+          </a:p>
+        </p:txBody>
+      </p:sp>
+      <p:sp>
+        <p:nvSpPr>
+          <p:cNvPr id="8" name="TextBox 7"/>
+          <p:cNvSpPr txBox="1"/>
+          <p:nvPr/>
+        </p:nvSpPr>
+        <p:spPr>
+          <a:xfrm>
+            <a:off x="914400" y="5669280"/>
+            <a:ext cx="12801600" cy="1005840"/>
+          </a:xfrm>
+          <a:prstGeom prst="rect">
+            <a:avLst/>
+          </a:prstGeom>
+          <a:noFill/>
+        </p:spPr>
+        <p:txBody>
+          <a:bodyPr wrap="square">
+            <a:spAutoFit/>
+          </a:bodyPr>
+          <a:lstStyle/>
+          <a:p>
+            <a:pPr>
+              <a:spcAft>
+                <a:spcPts val="1400"/>
+              </a:spcAft>
+              <a:defRPr sz="2200" b="0">
+                <a:solidFill>
+                  <a:srgbClr val="243A50"/>
+                </a:solidFill>
+                <a:latin typeface="Noto Sans CJK SC"/>
+              </a:defRPr>
+            </a:pPr>
+            <a:r>
+              <a:rPr>
+                <a:ea typeface="Noto Sans CJK SC"/>
+              </a:rPr>
+              <a:t>XOR 与升维  /  核技巧  /  半正定条件</a:t>
+            </a:r>
+          </a:p>
+          <a:p>
+            <a:pPr>
+              <a:spcAft>
+                <a:spcPts val="1400"/>
+              </a:spcAft>
+              <a:defRPr sz="2200" b="0">
+                <a:solidFill>
+                  <a:srgbClr val="243A50"/>
+                </a:solidFill>
+                <a:latin typeface="Noto Sans CJK SC"/>
+              </a:defRPr>
+            </a:pPr>
+            <a:r>
+              <a:rPr>
+                <a:ea typeface="Noto Sans CJK SC"/>
+              </a:rPr>
+              <a:t>多项式核  /  高斯 RBF 核</a:t>
+            </a:r>
+          </a:p>
+        </p:txBody>
+      </p:sp>
+      <p:sp>
+        <p:nvSpPr>
+          <p:cNvPr id="9" name="TextBox 8"/>
+          <p:cNvSpPr txBox="1"/>
+          <p:nvPr/>
+        </p:nvSpPr>
+        <p:spPr>
+          <a:xfrm>
+            <a:off x="13487400" y="7708392"/>
+            <a:ext cx="777240" cy="320040"/>
+          </a:xfrm>
+          <a:prstGeom prst="rect">
+            <a:avLst/>
+          </a:prstGeom>
+          <a:noFill/>
+        </p:spPr>
+        <p:txBody>
+          <a:bodyPr wrap="square">
+            <a:spAutoFit/>
+          </a:bodyPr>
+          <a:lstStyle/>
+          <a:p>
+            <a:pPr>
+              <a:spcAft>
+                <a:spcPts val="1400"/>
+              </a:spcAft>
+              <a:defRPr sz="1200" b="0">
+                <a:solidFill>
+                  <a:srgbClr val="60758A"/>
+                </a:solidFill>
+                <a:latin typeface="Noto Sans CJK SC"/>
+              </a:defRPr>
+            </a:pPr>
+            <a:r>
+              <a:rPr>
+                <a:ea typeface="Noto Sans CJK SC"/>
+              </a:rPr>
+              <a:t>01 / 25</a:t>
+            </a:r>
+          </a:p>
+        </p:txBody>
+      </p:sp>
+    </p:spTree>
+  </p:cSld>
+  <p:clrMapOvr>
+    <a:masterClrMapping/>
+  </p:clrMapOvr>
+</p:sld>
+</file>
+
+<file path=ppt/slides/slide24.xml><?xml version="1.0" encoding="utf-8"?>
+<p:sld xmlns:a="http://schemas.openxmlformats.org/drawingml/2006/main" xmlns:p="http://schemas.openxmlformats.org/presentationml/2006/main" xmlns:r="http://schemas.openxmlformats.org/officeDocument/2006/relationships">
+  <p:cSld>
+    <p:bg>
+      <p:bgPr>
+        <a:solidFill>
+          <a:srgbClr val="FFFFFF"/>
+        </a:solidFill>
+        <a:effectLst/>
+      </p:bgPr>
+    </p:bg>
+    <p:spTree>
+      <p:nvGrpSpPr>
+        <p:cNvPr id="1" name=""/>
+        <p:cNvGrpSpPr/>
+        <p:nvPr/>
+      </p:nvGrpSpPr>
+      <p:grpSpPr/>
+      <p:sp>
+        <p:nvSpPr>
+          <p:cNvPr id="2" name="Rectangle 1"/>
+          <p:cNvSpPr/>
+          <p:nvPr/>
+        </p:nvSpPr>
+        <p:spPr>
+          <a:xfrm>
+            <a:off x="0" y="0"/>
+            <a:ext cx="14630400" cy="128016"/>
+          </a:xfrm>
+          <a:prstGeom prst="rect">
+            <a:avLst/>
+          </a:prstGeom>
+          <a:solidFill>
+            <a:srgbClr val="142F50"/>
+          </a:solidFill>
+          <a:ln>
+            <a:noFill/>
+          </a:ln>
+        </p:spPr>
+        <p:txBody>
+          <a:bodyPr rtlCol="0" anchor="ctr"/>
+          <a:lstStyle/>
+          <a:p>
+            <a:pPr algn="ctr"/>
+          </a:p>
+        </p:txBody>
+      </p:sp>
+      <p:cxnSp>
+        <p:nvCxnSpPr>
+          <p:cNvPr id="3" name="Connector 5"/>
+          <p:cNvCxnSpPr/>
+          <p:nvPr/>
+        </p:nvCxnSpPr>
+        <p:spPr>
+          <a:xfrm>
+            <a:off x="548640" y="987552"/>
+            <a:ext cx="13533120" cy="0"/>
+          </a:xfrm>
+          <a:prstGeom prst="line">
+            <a:avLst/>
+          </a:prstGeom>
+          <a:ln w="12700">
+            <a:solidFill>
+              <a:srgbClr val="DFE7EF"/>
+            </a:solidFill>
+          </a:ln>
+        </p:spPr>
+        <p:style>
+          <a:lnRef idx="2">
+            <a:schemeClr val="accent1"/>
+          </a:lnRef>
+          <a:fillRef idx="0">
+            <a:schemeClr val="accent1"/>
+          </a:fillRef>
+          <a:effectRef idx="1">
+            <a:schemeClr val="accent1"/>
+          </a:effectRef>
+          <a:fontRef idx="minor">
+            <a:schemeClr val="tx1"/>
+          </a:fontRef>
+        </p:style>
+      </p:cxnSp>
+      <p:sp>
+        <p:nvSpPr>
+          <p:cNvPr id="4" name="TextBox 3"/>
+          <p:cNvSpPr txBox="1"/>
+          <p:nvPr/>
+        </p:nvSpPr>
+        <p:spPr>
+          <a:xfrm>
+            <a:off x="594360" y="301752"/>
+            <a:ext cx="13441680" cy="548640"/>
+          </a:xfrm>
+          <a:prstGeom prst="rect">
+            <a:avLst/>
+          </a:prstGeom>
+          <a:noFill/>
+        </p:spPr>
+        <p:txBody>
+          <a:bodyPr wrap="square">
+            <a:spAutoFit/>
+          </a:bodyPr>
+          <a:lstStyle/>
+          <a:p>
+            <a:pPr>
+              <a:spcAft>
+                <a:spcPts val="1400"/>
+              </a:spcAft>
+              <a:defRPr sz="3000" b="1">
+                <a:solidFill>
+                  <a:srgbClr val="142F50"/>
+                </a:solidFill>
+                <a:latin typeface="Noto Sans CJK SC"/>
+              </a:defRPr>
+            </a:pPr>
+            <a:r>
+              <a:rPr>
+                <a:ea typeface="Noto Sans CJK SC"/>
+              </a:rPr>
+              <a:t>课程目录｜五个小节与应用闭环</a:t>
+            </a:r>
+          </a:p>
+        </p:txBody>
+      </p:sp>
+      <p:sp>
+        <p:nvSpPr>
+          <p:cNvPr id="5" name="TextBox 4"/>
+          <p:cNvSpPr txBox="1"/>
+          <p:nvPr/>
+        </p:nvSpPr>
+        <p:spPr>
+          <a:xfrm>
+            <a:off x="777240" y="1417320"/>
+            <a:ext cx="1005840" cy="548640"/>
+          </a:xfrm>
+          <a:prstGeom prst="rect">
+            <a:avLst/>
+          </a:prstGeom>
+          <a:noFill/>
+        </p:spPr>
+        <p:txBody>
+          <a:bodyPr wrap="square">
+            <a:spAutoFit/>
+          </a:bodyPr>
+          <a:lstStyle/>
+          <a:p>
+            <a:pPr>
+              <a:spcAft>
+                <a:spcPts val="1400"/>
+              </a:spcAft>
+              <a:defRPr sz="2400" b="1">
+                <a:solidFill>
+                  <a:srgbClr val="142F50"/>
+                </a:solidFill>
+                <a:latin typeface="Noto Sans CJK SC"/>
+              </a:defRPr>
+            </a:pPr>
+            <a:r>
+              <a:rPr>
+                <a:ea typeface="Noto Sans CJK SC"/>
+              </a:rPr>
+              <a:t>01</a:t>
+            </a:r>
+          </a:p>
+        </p:txBody>
+      </p:sp>
+      <p:sp>
+        <p:nvSpPr>
+          <p:cNvPr id="6" name="TextBox 5"/>
+          <p:cNvSpPr txBox="1"/>
+          <p:nvPr/>
+        </p:nvSpPr>
+        <p:spPr>
+          <a:xfrm>
+            <a:off x="1920240" y="1417320"/>
+            <a:ext cx="9144000" cy="548640"/>
+          </a:xfrm>
+          <a:prstGeom prst="rect">
+            <a:avLst/>
+          </a:prstGeom>
+          <a:noFill/>
+        </p:spPr>
+        <p:txBody>
+          <a:bodyPr wrap="square">
+            <a:spAutoFit/>
+          </a:bodyPr>
+          <a:lstStyle/>
+          <a:p>
+            <a:pPr>
+              <a:spcAft>
+                <a:spcPts val="1400"/>
+              </a:spcAft>
+              <a:defRPr sz="2500" b="0">
+                <a:solidFill>
+                  <a:srgbClr val="243A50"/>
+                </a:solidFill>
+                <a:latin typeface="Noto Sans CJK SC"/>
+              </a:defRPr>
+            </a:pPr>
+            <a:r>
+              <a:rPr>
+                <a:ea typeface="Noto Sans CJK SC"/>
+              </a:rPr>
+              <a:t>XOR 与升维</a:t>
+            </a:r>
+          </a:p>
+        </p:txBody>
+      </p:sp>
+      <p:sp>
+        <p:nvSpPr>
+          <p:cNvPr id="7" name="TextBox 6"/>
+          <p:cNvSpPr txBox="1"/>
+          <p:nvPr/>
+        </p:nvSpPr>
+        <p:spPr>
+          <a:xfrm>
+            <a:off x="11247120" y="1417320"/>
+            <a:ext cx="2743200" cy="548640"/>
+          </a:xfrm>
+          <a:prstGeom prst="rect">
+            <a:avLst/>
+          </a:prstGeom>
+          <a:noFill/>
+        </p:spPr>
+        <p:txBody>
+          <a:bodyPr wrap="square">
+            <a:spAutoFit/>
+          </a:bodyPr>
+          <a:lstStyle/>
+          <a:p>
+            <a:pPr>
+              <a:spcAft>
+                <a:spcPts val="1400"/>
+              </a:spcAft>
+              <a:defRPr sz="2200" b="0">
+                <a:solidFill>
+                  <a:srgbClr val="243A50"/>
+                </a:solidFill>
+                <a:latin typeface="Noto Sans CJK SC"/>
+              </a:defRPr>
+            </a:pPr>
+            <a:r>
+              <a:rPr>
+                <a:ea typeface="Noto Sans CJK SC"/>
+              </a:rPr>
+              <a:t>第 4–6 页</a:t>
+            </a:r>
+          </a:p>
+        </p:txBody>
+      </p:sp>
+      <p:sp>
+        <p:nvSpPr>
+          <p:cNvPr id="8" name="TextBox 7"/>
+          <p:cNvSpPr txBox="1"/>
+          <p:nvPr/>
+        </p:nvSpPr>
+        <p:spPr>
+          <a:xfrm>
+            <a:off x="777240" y="2176272"/>
+            <a:ext cx="1005840" cy="548640"/>
+          </a:xfrm>
+          <a:prstGeom prst="rect">
+            <a:avLst/>
+          </a:prstGeom>
+          <a:noFill/>
+        </p:spPr>
+        <p:txBody>
+          <a:bodyPr wrap="square">
+            <a:spAutoFit/>
+          </a:bodyPr>
+          <a:lstStyle/>
+          <a:p>
+            <a:pPr>
+              <a:spcAft>
+                <a:spcPts val="1400"/>
+              </a:spcAft>
+              <a:defRPr sz="2400" b="1">
+                <a:solidFill>
+                  <a:srgbClr val="142F50"/>
+                </a:solidFill>
+                <a:latin typeface="Noto Sans CJK SC"/>
+              </a:defRPr>
+            </a:pPr>
+            <a:r>
+              <a:rPr>
+                <a:ea typeface="Noto Sans CJK SC"/>
+              </a:rPr>
+              <a:t>02</a:t>
+            </a:r>
+          </a:p>
+        </p:txBody>
+      </p:sp>
+      <p:sp>
+        <p:nvSpPr>
+          <p:cNvPr id="9" name="TextBox 8"/>
+          <p:cNvSpPr txBox="1"/>
+          <p:nvPr/>
+        </p:nvSpPr>
+        <p:spPr>
+          <a:xfrm>
+            <a:off x="1920240" y="2176272"/>
+            <a:ext cx="9144000" cy="548640"/>
+          </a:xfrm>
+          <a:prstGeom prst="rect">
+            <a:avLst/>
+          </a:prstGeom>
+          <a:noFill/>
+        </p:spPr>
+        <p:txBody>
+          <a:bodyPr wrap="square">
+            <a:spAutoFit/>
+          </a:bodyPr>
+          <a:lstStyle/>
+          <a:p>
+            <a:pPr>
+              <a:spcAft>
+                <a:spcPts val="1400"/>
+              </a:spcAft>
+              <a:defRPr sz="2500" b="0">
+                <a:solidFill>
+                  <a:srgbClr val="243A50"/>
+                </a:solidFill>
+                <a:latin typeface="Noto Sans CJK SC"/>
+              </a:defRPr>
+            </a:pPr>
+            <a:r>
+              <a:rPr>
+                <a:ea typeface="Noto Sans CJK SC"/>
+              </a:rPr>
+              <a:t>核函数与核技巧</a:t>
+            </a:r>
+          </a:p>
+        </p:txBody>
+      </p:sp>
+      <p:sp>
+        <p:nvSpPr>
+          <p:cNvPr id="10" name="TextBox 9"/>
+          <p:cNvSpPr txBox="1"/>
+          <p:nvPr/>
+        </p:nvSpPr>
+        <p:spPr>
+          <a:xfrm>
+            <a:off x="11247120" y="2176272"/>
+            <a:ext cx="2743200" cy="548640"/>
+          </a:xfrm>
+          <a:prstGeom prst="rect">
+            <a:avLst/>
+          </a:prstGeom>
+          <a:noFill/>
+        </p:spPr>
+        <p:txBody>
+          <a:bodyPr wrap="square">
+            <a:spAutoFit/>
+          </a:bodyPr>
+          <a:lstStyle/>
+          <a:p>
+            <a:pPr>
+              <a:spcAft>
+                <a:spcPts val="1400"/>
+              </a:spcAft>
+              <a:defRPr sz="2200" b="0">
+                <a:solidFill>
+                  <a:srgbClr val="243A50"/>
+                </a:solidFill>
+                <a:latin typeface="Noto Sans CJK SC"/>
+              </a:defRPr>
+            </a:pPr>
+            <a:r>
+              <a:rPr>
+                <a:ea typeface="Noto Sans CJK SC"/>
+              </a:rPr>
+              <a:t>第 7–10 页</a:t>
+            </a:r>
+          </a:p>
+        </p:txBody>
+      </p:sp>
+      <p:sp>
+        <p:nvSpPr>
+          <p:cNvPr id="11" name="TextBox 10"/>
+          <p:cNvSpPr txBox="1"/>
+          <p:nvPr/>
+        </p:nvSpPr>
+        <p:spPr>
+          <a:xfrm>
+            <a:off x="777240" y="2935224"/>
+            <a:ext cx="1005840" cy="548640"/>
+          </a:xfrm>
+          <a:prstGeom prst="rect">
+            <a:avLst/>
+          </a:prstGeom>
+          <a:noFill/>
+        </p:spPr>
+        <p:txBody>
+          <a:bodyPr wrap="square">
+            <a:spAutoFit/>
+          </a:bodyPr>
+          <a:lstStyle/>
+          <a:p>
+            <a:pPr>
+              <a:spcAft>
+                <a:spcPts val="1400"/>
+              </a:spcAft>
+              <a:defRPr sz="2400" b="1">
+                <a:solidFill>
+                  <a:srgbClr val="142F50"/>
+                </a:solidFill>
+                <a:latin typeface="Noto Sans CJK SC"/>
+              </a:defRPr>
+            </a:pPr>
+            <a:r>
+              <a:rPr>
+                <a:ea typeface="Noto Sans CJK SC"/>
+              </a:rPr>
+              <a:t>03</a:t>
+            </a:r>
+          </a:p>
+        </p:txBody>
+      </p:sp>
+      <p:sp>
+        <p:nvSpPr>
+          <p:cNvPr id="12" name="TextBox 11"/>
+          <p:cNvSpPr txBox="1"/>
+          <p:nvPr/>
+        </p:nvSpPr>
+        <p:spPr>
+          <a:xfrm>
+            <a:off x="1920240" y="2935224"/>
+            <a:ext cx="9144000" cy="548640"/>
+          </a:xfrm>
+          <a:prstGeom prst="rect">
+            <a:avLst/>
+          </a:prstGeom>
+          <a:noFill/>
+        </p:spPr>
+        <p:txBody>
+          <a:bodyPr wrap="square">
+            <a:spAutoFit/>
+          </a:bodyPr>
+          <a:lstStyle/>
+          <a:p>
+            <a:pPr>
+              <a:spcAft>
+                <a:spcPts val="1400"/>
+              </a:spcAft>
+              <a:defRPr sz="2500" b="0">
+                <a:solidFill>
+                  <a:srgbClr val="243A50"/>
+                </a:solidFill>
+                <a:latin typeface="Noto Sans CJK SC"/>
+              </a:defRPr>
+            </a:pPr>
+            <a:r>
+              <a:rPr>
+                <a:ea typeface="Noto Sans CJK SC"/>
+              </a:rPr>
+              <a:t>Mercer 与半正定性</a:t>
+            </a:r>
+          </a:p>
+        </p:txBody>
+      </p:sp>
+      <p:sp>
+        <p:nvSpPr>
+          <p:cNvPr id="13" name="TextBox 12"/>
+          <p:cNvSpPr txBox="1"/>
+          <p:nvPr/>
+        </p:nvSpPr>
+        <p:spPr>
+          <a:xfrm>
+            <a:off x="11247120" y="2935224"/>
+            <a:ext cx="2743200" cy="548640"/>
+          </a:xfrm>
+          <a:prstGeom prst="rect">
+            <a:avLst/>
+          </a:prstGeom>
+          <a:noFill/>
+        </p:spPr>
+        <p:txBody>
+          <a:bodyPr wrap="square">
+            <a:spAutoFit/>
+          </a:bodyPr>
+          <a:lstStyle/>
+          <a:p>
+            <a:pPr>
+              <a:spcAft>
+                <a:spcPts val="1400"/>
+              </a:spcAft>
+              <a:defRPr sz="2200" b="0">
+                <a:solidFill>
+                  <a:srgbClr val="243A50"/>
+                </a:solidFill>
+                <a:latin typeface="Noto Sans CJK SC"/>
+              </a:defRPr>
+            </a:pPr>
+            <a:r>
+              <a:rPr>
+                <a:ea typeface="Noto Sans CJK SC"/>
+              </a:rPr>
+              <a:t>第 11–13 页</a:t>
+            </a:r>
+          </a:p>
+        </p:txBody>
+      </p:sp>
+      <p:sp>
+        <p:nvSpPr>
+          <p:cNvPr id="14" name="TextBox 13"/>
+          <p:cNvSpPr txBox="1"/>
+          <p:nvPr/>
+        </p:nvSpPr>
+        <p:spPr>
+          <a:xfrm>
+            <a:off x="777240" y="3694176"/>
+            <a:ext cx="1005840" cy="548640"/>
+          </a:xfrm>
+          <a:prstGeom prst="rect">
+            <a:avLst/>
+          </a:prstGeom>
+          <a:noFill/>
+        </p:spPr>
+        <p:txBody>
+          <a:bodyPr wrap="square">
+            <a:spAutoFit/>
+          </a:bodyPr>
+          <a:lstStyle/>
+          <a:p>
+            <a:pPr>
+              <a:spcAft>
+                <a:spcPts val="1400"/>
+              </a:spcAft>
+              <a:defRPr sz="2400" b="1">
+                <a:solidFill>
+                  <a:srgbClr val="142F50"/>
+                </a:solidFill>
+                <a:latin typeface="Noto Sans CJK SC"/>
+              </a:defRPr>
+            </a:pPr>
+            <a:r>
+              <a:rPr>
+                <a:ea typeface="Noto Sans CJK SC"/>
+              </a:rPr>
+              <a:t>04</a:t>
+            </a:r>
+          </a:p>
+        </p:txBody>
+      </p:sp>
+      <p:sp>
+        <p:nvSpPr>
+          <p:cNvPr id="15" name="TextBox 14"/>
+          <p:cNvSpPr txBox="1"/>
+          <p:nvPr/>
+        </p:nvSpPr>
+        <p:spPr>
+          <a:xfrm>
+            <a:off x="1920240" y="3694176"/>
+            <a:ext cx="9144000" cy="548640"/>
+          </a:xfrm>
+          <a:prstGeom prst="rect">
+            <a:avLst/>
+          </a:prstGeom>
+          <a:noFill/>
+        </p:spPr>
+        <p:txBody>
+          <a:bodyPr wrap="square">
+            <a:spAutoFit/>
+          </a:bodyPr>
+          <a:lstStyle/>
+          <a:p>
+            <a:pPr>
+              <a:spcAft>
+                <a:spcPts val="1400"/>
+              </a:spcAft>
+              <a:defRPr sz="2500" b="0">
+                <a:solidFill>
+                  <a:srgbClr val="243A50"/>
+                </a:solidFill>
+                <a:latin typeface="Noto Sans CJK SC"/>
+              </a:defRPr>
+            </a:pPr>
+            <a:r>
+              <a:rPr>
+                <a:ea typeface="Noto Sans CJK SC"/>
+              </a:rPr>
+              <a:t>多项式核</a:t>
+            </a:r>
+          </a:p>
+        </p:txBody>
+      </p:sp>
+      <p:sp>
+        <p:nvSpPr>
+          <p:cNvPr id="16" name="TextBox 15"/>
+          <p:cNvSpPr txBox="1"/>
+          <p:nvPr/>
+        </p:nvSpPr>
+        <p:spPr>
+          <a:xfrm>
+            <a:off x="11247120" y="3694176"/>
+            <a:ext cx="2743200" cy="548640"/>
+          </a:xfrm>
+          <a:prstGeom prst="rect">
+            <a:avLst/>
+          </a:prstGeom>
+          <a:noFill/>
+        </p:spPr>
+        <p:txBody>
+          <a:bodyPr wrap="square">
+            <a:spAutoFit/>
+          </a:bodyPr>
+          <a:lstStyle/>
+          <a:p>
+            <a:pPr>
+              <a:spcAft>
+                <a:spcPts val="1400"/>
+              </a:spcAft>
+              <a:defRPr sz="2200" b="0">
+                <a:solidFill>
+                  <a:srgbClr val="243A50"/>
+                </a:solidFill>
+                <a:latin typeface="Noto Sans CJK SC"/>
+              </a:defRPr>
+            </a:pPr>
+            <a:r>
+              <a:rPr>
+                <a:ea typeface="Noto Sans CJK SC"/>
+              </a:rPr>
+              <a:t>第 14–15 页</a:t>
+            </a:r>
+          </a:p>
+        </p:txBody>
+      </p:sp>
+      <p:sp>
+        <p:nvSpPr>
+          <p:cNvPr id="17" name="TextBox 16"/>
+          <p:cNvSpPr txBox="1"/>
+          <p:nvPr/>
+        </p:nvSpPr>
+        <p:spPr>
+          <a:xfrm>
+            <a:off x="777240" y="4453128"/>
+            <a:ext cx="1005840" cy="548640"/>
+          </a:xfrm>
+          <a:prstGeom prst="rect">
+            <a:avLst/>
+          </a:prstGeom>
+          <a:noFill/>
+        </p:spPr>
+        <p:txBody>
+          <a:bodyPr wrap="square">
+            <a:spAutoFit/>
+          </a:bodyPr>
+          <a:lstStyle/>
+          <a:p>
+            <a:pPr>
+              <a:spcAft>
+                <a:spcPts val="1400"/>
+              </a:spcAft>
+              <a:defRPr sz="2400" b="1">
+                <a:solidFill>
+                  <a:srgbClr val="142F50"/>
+                </a:solidFill>
+                <a:latin typeface="Noto Sans CJK SC"/>
+              </a:defRPr>
+            </a:pPr>
+            <a:r>
+              <a:rPr>
+                <a:ea typeface="Noto Sans CJK SC"/>
+              </a:rPr>
+              <a:t>05</a:t>
+            </a:r>
+          </a:p>
+        </p:txBody>
+      </p:sp>
+      <p:sp>
+        <p:nvSpPr>
+          <p:cNvPr id="18" name="TextBox 17"/>
+          <p:cNvSpPr txBox="1"/>
+          <p:nvPr/>
+        </p:nvSpPr>
+        <p:spPr>
+          <a:xfrm>
+            <a:off x="1920240" y="4453128"/>
+            <a:ext cx="9144000" cy="548640"/>
+          </a:xfrm>
+          <a:prstGeom prst="rect">
+            <a:avLst/>
+          </a:prstGeom>
+          <a:noFill/>
+        </p:spPr>
+        <p:txBody>
+          <a:bodyPr wrap="square">
+            <a:spAutoFit/>
+          </a:bodyPr>
+          <a:lstStyle/>
+          <a:p>
+            <a:pPr>
+              <a:spcAft>
+                <a:spcPts val="1400"/>
+              </a:spcAft>
+              <a:defRPr sz="2500" b="0">
+                <a:solidFill>
+                  <a:srgbClr val="243A50"/>
+                </a:solidFill>
+                <a:latin typeface="Noto Sans CJK SC"/>
+              </a:defRPr>
+            </a:pPr>
+            <a:r>
+              <a:rPr>
+                <a:ea typeface="Noto Sans CJK SC"/>
+              </a:rPr>
+              <a:t>高斯 RBF 核</a:t>
+            </a:r>
+          </a:p>
+        </p:txBody>
+      </p:sp>
+      <p:sp>
+        <p:nvSpPr>
+          <p:cNvPr id="19" name="TextBox 18"/>
+          <p:cNvSpPr txBox="1"/>
+          <p:nvPr/>
+        </p:nvSpPr>
+        <p:spPr>
+          <a:xfrm>
+            <a:off x="11247120" y="4453128"/>
+            <a:ext cx="2743200" cy="548640"/>
+          </a:xfrm>
+          <a:prstGeom prst="rect">
+            <a:avLst/>
+          </a:prstGeom>
+          <a:noFill/>
+        </p:spPr>
+        <p:txBody>
+          <a:bodyPr wrap="square">
+            <a:spAutoFit/>
+          </a:bodyPr>
+          <a:lstStyle/>
+          <a:p>
+            <a:pPr>
+              <a:spcAft>
+                <a:spcPts val="1400"/>
+              </a:spcAft>
+              <a:defRPr sz="2200" b="0">
+                <a:solidFill>
+                  <a:srgbClr val="243A50"/>
+                </a:solidFill>
+                <a:latin typeface="Noto Sans CJK SC"/>
+              </a:defRPr>
+            </a:pPr>
+            <a:r>
+              <a:rPr>
+                <a:ea typeface="Noto Sans CJK SC"/>
+              </a:rPr>
+              <a:t>第 16–18 页</a:t>
+            </a:r>
+          </a:p>
+        </p:txBody>
+      </p:sp>
+      <p:sp>
+        <p:nvSpPr>
+          <p:cNvPr id="20" name="TextBox 19"/>
+          <p:cNvSpPr txBox="1"/>
+          <p:nvPr/>
+        </p:nvSpPr>
+        <p:spPr>
+          <a:xfrm>
+            <a:off x="777240" y="5212079"/>
+            <a:ext cx="1005840" cy="548640"/>
+          </a:xfrm>
+          <a:prstGeom prst="rect">
+            <a:avLst/>
+          </a:prstGeom>
+          <a:noFill/>
+        </p:spPr>
+        <p:txBody>
+          <a:bodyPr wrap="square">
+            <a:spAutoFit/>
+          </a:bodyPr>
+          <a:lstStyle/>
+          <a:p>
+            <a:pPr>
+              <a:spcAft>
+                <a:spcPts val="1400"/>
+              </a:spcAft>
+              <a:defRPr sz="2400" b="1">
+                <a:solidFill>
+                  <a:srgbClr val="142F50"/>
+                </a:solidFill>
+                <a:latin typeface="Noto Sans CJK SC"/>
+              </a:defRPr>
+            </a:pPr>
+            <a:r>
+              <a:rPr>
+                <a:ea typeface="Noto Sans CJK SC"/>
+              </a:rPr>
+              <a:t>应用</a:t>
+            </a:r>
+          </a:p>
+        </p:txBody>
+      </p:sp>
+      <p:sp>
+        <p:nvSpPr>
+          <p:cNvPr id="21" name="TextBox 20"/>
+          <p:cNvSpPr txBox="1"/>
+          <p:nvPr/>
+        </p:nvSpPr>
+        <p:spPr>
+          <a:xfrm>
+            <a:off x="1920240" y="5212079"/>
+            <a:ext cx="9144000" cy="548640"/>
+          </a:xfrm>
+          <a:prstGeom prst="rect">
+            <a:avLst/>
+          </a:prstGeom>
+          <a:noFill/>
+        </p:spPr>
+        <p:txBody>
+          <a:bodyPr wrap="square">
+            <a:spAutoFit/>
+          </a:bodyPr>
+          <a:lstStyle/>
+          <a:p>
+            <a:pPr>
+              <a:spcAft>
+                <a:spcPts val="1400"/>
+              </a:spcAft>
+              <a:defRPr sz="2500" b="0">
+                <a:solidFill>
+                  <a:srgbClr val="243A50"/>
+                </a:solidFill>
+                <a:latin typeface="Noto Sans CJK SC"/>
+              </a:defRPr>
+            </a:pPr>
+            <a:r>
+              <a:rPr>
+                <a:ea typeface="Noto Sans CJK SC"/>
+              </a:rPr>
+              <a:t>训练、预测与模型选择</a:t>
+            </a:r>
+          </a:p>
+        </p:txBody>
+      </p:sp>
+      <p:sp>
+        <p:nvSpPr>
+          <p:cNvPr id="22" name="TextBox 21"/>
+          <p:cNvSpPr txBox="1"/>
+          <p:nvPr/>
+        </p:nvSpPr>
+        <p:spPr>
+          <a:xfrm>
+            <a:off x="11247120" y="5212079"/>
+            <a:ext cx="2743200" cy="548640"/>
+          </a:xfrm>
+          <a:prstGeom prst="rect">
+            <a:avLst/>
+          </a:prstGeom>
+          <a:noFill/>
+        </p:spPr>
+        <p:txBody>
+          <a:bodyPr wrap="square">
+            <a:spAutoFit/>
+          </a:bodyPr>
+          <a:lstStyle/>
+          <a:p>
+            <a:pPr>
+              <a:spcAft>
+                <a:spcPts val="1400"/>
+              </a:spcAft>
+              <a:defRPr sz="2200" b="0">
+                <a:solidFill>
+                  <a:srgbClr val="243A50"/>
+                </a:solidFill>
+                <a:latin typeface="Noto Sans CJK SC"/>
+              </a:defRPr>
+            </a:pPr>
+            <a:r>
+              <a:rPr>
+                <a:ea typeface="Noto Sans CJK SC"/>
+              </a:rPr>
+              <a:t>第 19–22 页</a:t>
+            </a:r>
+          </a:p>
+        </p:txBody>
+      </p:sp>
+      <p:sp>
+        <p:nvSpPr>
+          <p:cNvPr id="23" name="TextBox 22"/>
+          <p:cNvSpPr txBox="1"/>
+          <p:nvPr/>
+        </p:nvSpPr>
+        <p:spPr>
+          <a:xfrm>
+            <a:off x="777240" y="5971031"/>
+            <a:ext cx="1005840" cy="548640"/>
+          </a:xfrm>
+          <a:prstGeom prst="rect">
+            <a:avLst/>
+          </a:prstGeom>
+          <a:noFill/>
+        </p:spPr>
+        <p:txBody>
+          <a:bodyPr wrap="square">
+            <a:spAutoFit/>
+          </a:bodyPr>
+          <a:lstStyle/>
+          <a:p>
+            <a:pPr>
+              <a:spcAft>
+                <a:spcPts val="1400"/>
+              </a:spcAft>
+              <a:defRPr sz="2400" b="1">
+                <a:solidFill>
+                  <a:srgbClr val="142F50"/>
+                </a:solidFill>
+                <a:latin typeface="Noto Sans CJK SC"/>
+              </a:defRPr>
+            </a:pPr>
+            <a:r>
+              <a:rPr>
+                <a:ea typeface="Noto Sans CJK SC"/>
+              </a:rPr>
+              <a:t>回顾</a:t>
+            </a:r>
+          </a:p>
+        </p:txBody>
+      </p:sp>
+      <p:sp>
+        <p:nvSpPr>
+          <p:cNvPr id="24" name="TextBox 23"/>
+          <p:cNvSpPr txBox="1"/>
+          <p:nvPr/>
+        </p:nvSpPr>
+        <p:spPr>
+          <a:xfrm>
+            <a:off x="1920240" y="5971031"/>
+            <a:ext cx="9144000" cy="548640"/>
+          </a:xfrm>
+          <a:prstGeom prst="rect">
+            <a:avLst/>
+          </a:prstGeom>
+          <a:noFill/>
+        </p:spPr>
+        <p:txBody>
+          <a:bodyPr wrap="square">
+            <a:spAutoFit/>
+          </a:bodyPr>
+          <a:lstStyle/>
+          <a:p>
+            <a:pPr>
+              <a:spcAft>
+                <a:spcPts val="1400"/>
+              </a:spcAft>
+              <a:defRPr sz="2500" b="0">
+                <a:solidFill>
+                  <a:srgbClr val="243A50"/>
+                </a:solidFill>
+                <a:latin typeface="Noto Sans CJK SC"/>
+              </a:defRPr>
+            </a:pPr>
+            <a:r>
+              <a:rPr>
+                <a:ea typeface="Noto Sans CJK SC"/>
+              </a:rPr>
+              <a:t>逻辑链、课堂检测与小结</a:t>
+            </a:r>
+          </a:p>
+        </p:txBody>
+      </p:sp>
+      <p:sp>
+        <p:nvSpPr>
+          <p:cNvPr id="25" name="TextBox 24"/>
+          <p:cNvSpPr txBox="1"/>
+          <p:nvPr/>
+        </p:nvSpPr>
+        <p:spPr>
+          <a:xfrm>
+            <a:off x="11247120" y="5971031"/>
+            <a:ext cx="2743200" cy="548640"/>
+          </a:xfrm>
+          <a:prstGeom prst="rect">
+            <a:avLst/>
+          </a:prstGeom>
+          <a:noFill/>
+        </p:spPr>
+        <p:txBody>
+          <a:bodyPr wrap="square">
+            <a:spAutoFit/>
+          </a:bodyPr>
+          <a:lstStyle/>
+          <a:p>
+            <a:pPr>
+              <a:spcAft>
+                <a:spcPts val="1400"/>
+              </a:spcAft>
+              <a:defRPr sz="2200" b="0">
+                <a:solidFill>
+                  <a:srgbClr val="243A50"/>
+                </a:solidFill>
+                <a:latin typeface="Noto Sans CJK SC"/>
+              </a:defRPr>
+            </a:pPr>
+            <a:r>
+              <a:rPr>
+                <a:ea typeface="Noto Sans CJK SC"/>
+              </a:rPr>
+              <a:t>第 23–25 页</a:t>
+            </a:r>
+          </a:p>
+        </p:txBody>
+      </p:sp>
+      <p:sp>
+        <p:nvSpPr>
+          <p:cNvPr id="26" name="TextBox 25"/>
+          <p:cNvSpPr txBox="1"/>
+          <p:nvPr/>
+        </p:nvSpPr>
+        <p:spPr>
+          <a:xfrm>
+            <a:off x="13487400" y="7708392"/>
+            <a:ext cx="777240" cy="320040"/>
+          </a:xfrm>
+          <a:prstGeom prst="rect">
+            <a:avLst/>
+          </a:prstGeom>
+          <a:noFill/>
+        </p:spPr>
+        <p:txBody>
+          <a:bodyPr wrap="square">
+            <a:spAutoFit/>
+          </a:bodyPr>
+          <a:lstStyle/>
+          <a:p>
+            <a:pPr>
+              <a:spcAft>
+                <a:spcPts val="1400"/>
+              </a:spcAft>
+              <a:defRPr sz="1200" b="0">
+                <a:solidFill>
+                  <a:srgbClr val="60758A"/>
+                </a:solidFill>
+                <a:latin typeface="Noto Sans CJK SC"/>
+              </a:defRPr>
+            </a:pPr>
+            <a:r>
+              <a:rPr>
+                <a:ea typeface="Noto Sans CJK SC"/>
+              </a:rPr>
+              <a:t>02 / 25</a:t>
+            </a:r>
+          </a:p>
+        </p:txBody>
+      </p:sp>
+    </p:spTree>
+  </p:cSld>
+  <p:clrMapOvr>
+    <a:masterClrMapping/>
+  </p:clrMapOvr>
+</p:sld>
+</file>
+
+<file path=ppt/slides/slide25.xml><?xml version="1.0" encoding="utf-8"?>
+<p:sld xmlns:a="http://schemas.openxmlformats.org/drawingml/2006/main" xmlns:p="http://schemas.openxmlformats.org/presentationml/2006/main" xmlns:r="http://schemas.openxmlformats.org/officeDocument/2006/relationships">
+  <p:cSld>
+    <p:bg>
+      <p:bgPr>
+        <a:solidFill>
+          <a:srgbClr val="FFFFFF"/>
+        </a:solidFill>
+        <a:effectLst/>
+      </p:bgPr>
+    </p:bg>
+    <p:spTree>
+      <p:nvGrpSpPr>
+        <p:cNvPr id="1" name=""/>
+        <p:cNvGrpSpPr/>
+        <p:nvPr/>
+      </p:nvGrpSpPr>
+      <p:grpSpPr/>
+      <p:sp>
+        <p:nvSpPr>
+          <p:cNvPr id="2" name="Rectangle 1"/>
+          <p:cNvSpPr/>
+          <p:nvPr/>
+        </p:nvSpPr>
+        <p:spPr>
+          <a:xfrm>
+            <a:off x="0" y="0"/>
+            <a:ext cx="14630400" cy="128016"/>
+          </a:xfrm>
+          <a:prstGeom prst="rect">
+            <a:avLst/>
+          </a:prstGeom>
+          <a:solidFill>
+            <a:srgbClr val="142F50"/>
+          </a:solidFill>
+          <a:ln>
+            <a:noFill/>
+          </a:ln>
+        </p:spPr>
+        <p:txBody>
+          <a:bodyPr rtlCol="0" anchor="ctr"/>
+          <a:lstStyle/>
+          <a:p>
+            <a:pPr algn="ctr"/>
+          </a:p>
+        </p:txBody>
+      </p:sp>
+      <p:cxnSp>
+        <p:nvCxnSpPr>
+          <p:cNvPr id="3" name="Connector 5"/>
+          <p:cNvCxnSpPr/>
+          <p:nvPr/>
+        </p:nvCxnSpPr>
+        <p:spPr>
+          <a:xfrm>
+            <a:off x="548640" y="987552"/>
+            <a:ext cx="13533120" cy="0"/>
+          </a:xfrm>
+          <a:prstGeom prst="line">
+            <a:avLst/>
+          </a:prstGeom>
+          <a:ln w="12700">
+            <a:solidFill>
+              <a:srgbClr val="DFE7EF"/>
+            </a:solidFill>
+          </a:ln>
+        </p:spPr>
+        <p:style>
+          <a:lnRef idx="2">
+            <a:schemeClr val="accent1"/>
+          </a:lnRef>
+          <a:fillRef idx="0">
+            <a:schemeClr val="accent1"/>
+          </a:fillRef>
+          <a:effectRef idx="1">
+            <a:schemeClr val="accent1"/>
+          </a:effectRef>
+          <a:fontRef idx="minor">
+            <a:schemeClr val="tx1"/>
+          </a:fontRef>
+        </p:style>
+      </p:cxnSp>
+      <p:sp>
+        <p:nvSpPr>
+          <p:cNvPr id="4" name="TextBox 3"/>
+          <p:cNvSpPr txBox="1"/>
+          <p:nvPr/>
+        </p:nvSpPr>
+        <p:spPr>
+          <a:xfrm>
+            <a:off x="594360" y="301752"/>
+            <a:ext cx="13441680" cy="548640"/>
+          </a:xfrm>
+          <a:prstGeom prst="rect">
+            <a:avLst/>
+          </a:prstGeom>
+          <a:noFill/>
+        </p:spPr>
+        <p:txBody>
+          <a:bodyPr wrap="square">
+            <a:spAutoFit/>
+          </a:bodyPr>
+          <a:lstStyle/>
+          <a:p>
+            <a:pPr>
+              <a:spcAft>
+                <a:spcPts val="1400"/>
+              </a:spcAft>
+              <a:defRPr sz="3000" b="1">
+                <a:solidFill>
+                  <a:srgbClr val="142F50"/>
+                </a:solidFill>
+                <a:latin typeface="Noto Sans CJK SC"/>
+              </a:defRPr>
+            </a:pPr>
+            <a:r>
+              <a:rPr>
+                <a:ea typeface="Noto Sans CJK SC"/>
+              </a:rPr>
+              <a:t>本课小结｜把五个小节串成一个方法</a:t>
+            </a:r>
+          </a:p>
+        </p:txBody>
+      </p:sp>
+      <p:sp>
+        <p:nvSpPr>
+          <p:cNvPr id="5" name="TextBox 4"/>
+          <p:cNvSpPr txBox="1"/>
+          <p:nvPr/>
+        </p:nvSpPr>
+        <p:spPr>
+          <a:xfrm>
+            <a:off x="777240" y="1508760"/>
+            <a:ext cx="1280160" cy="594360"/>
+          </a:xfrm>
+          <a:prstGeom prst="rect">
+            <a:avLst/>
+          </a:prstGeom>
+          <a:noFill/>
+        </p:spPr>
+        <p:txBody>
+          <a:bodyPr wrap="square">
+            <a:spAutoFit/>
+          </a:bodyPr>
+          <a:lstStyle/>
+          <a:p>
+            <a:pPr>
+              <a:spcAft>
+                <a:spcPts val="1400"/>
+              </a:spcAft>
+              <a:defRPr sz="2500" b="1">
+                <a:solidFill>
+                  <a:srgbClr val="142F50"/>
+                </a:solidFill>
+                <a:latin typeface="Noto Sans CJK SC"/>
+              </a:defRPr>
+            </a:pPr>
+            <a:r>
+              <a:rPr>
+                <a:ea typeface="Noto Sans CJK SC"/>
+              </a:rPr>
+              <a:t>问题</a:t>
+            </a:r>
+          </a:p>
+        </p:txBody>
+      </p:sp>
+      <p:sp>
+        <p:nvSpPr>
+          <p:cNvPr id="6" name="TextBox 5"/>
+          <p:cNvSpPr txBox="1"/>
+          <p:nvPr/>
+        </p:nvSpPr>
+        <p:spPr>
+          <a:xfrm>
+            <a:off x="2194560" y="1508760"/>
+            <a:ext cx="11521440" cy="777240"/>
+          </a:xfrm>
+          <a:prstGeom prst="rect">
+            <a:avLst/>
+          </a:prstGeom>
+          <a:noFill/>
+        </p:spPr>
+        <p:txBody>
+          <a:bodyPr wrap="square">
+            <a:spAutoFit/>
+          </a:bodyPr>
+          <a:lstStyle/>
+          <a:p>
+            <a:pPr>
+              <a:spcAft>
+                <a:spcPts val="1400"/>
+              </a:spcAft>
+              <a:defRPr sz="2400" b="0">
+                <a:solidFill>
+                  <a:srgbClr val="243A50"/>
+                </a:solidFill>
+                <a:latin typeface="Noto Sans CJK SC"/>
+              </a:defRPr>
+            </a:pPr>
+            <a:r>
+              <a:rPr>
+                <a:ea typeface="Noto Sans CJK SC"/>
+              </a:rPr>
+              <a:t>XOR 线性不可分 → 改变特征表示，而不是只调大 C</a:t>
+            </a:r>
+          </a:p>
+        </p:txBody>
+      </p:sp>
+      <p:sp>
+        <p:nvSpPr>
+          <p:cNvPr id="7" name="TextBox 6"/>
+          <p:cNvSpPr txBox="1"/>
+          <p:nvPr/>
+        </p:nvSpPr>
+        <p:spPr>
+          <a:xfrm>
+            <a:off x="777240" y="2478024"/>
+            <a:ext cx="1280160" cy="594360"/>
+          </a:xfrm>
+          <a:prstGeom prst="rect">
+            <a:avLst/>
+          </a:prstGeom>
+          <a:noFill/>
+        </p:spPr>
+        <p:txBody>
+          <a:bodyPr wrap="square">
+            <a:spAutoFit/>
+          </a:bodyPr>
+          <a:lstStyle/>
+          <a:p>
+            <a:pPr>
+              <a:spcAft>
+                <a:spcPts val="1400"/>
+              </a:spcAft>
+              <a:defRPr sz="2500" b="1">
+                <a:solidFill>
+                  <a:srgbClr val="142F50"/>
+                </a:solidFill>
+                <a:latin typeface="Noto Sans CJK SC"/>
+              </a:defRPr>
+            </a:pPr>
+            <a:r>
+              <a:rPr>
+                <a:ea typeface="Noto Sans CJK SC"/>
+              </a:rPr>
+              <a:t>计算</a:t>
+            </a:r>
+          </a:p>
+        </p:txBody>
+      </p:sp>
+      <p:sp>
+        <p:nvSpPr>
+          <p:cNvPr id="8" name="TextBox 7"/>
+          <p:cNvSpPr txBox="1"/>
+          <p:nvPr/>
+        </p:nvSpPr>
+        <p:spPr>
+          <a:xfrm>
+            <a:off x="2194560" y="2478024"/>
+            <a:ext cx="11521440" cy="777240"/>
+          </a:xfrm>
+          <a:prstGeom prst="rect">
+            <a:avLst/>
+          </a:prstGeom>
+          <a:noFill/>
+        </p:spPr>
+        <p:txBody>
+          <a:bodyPr wrap="square">
+            <a:spAutoFit/>
+          </a:bodyPr>
+          <a:lstStyle/>
+          <a:p>
+            <a:pPr>
+              <a:spcAft>
+                <a:spcPts val="1400"/>
+              </a:spcAft>
+              <a:defRPr sz="2400" b="0">
+                <a:solidFill>
+                  <a:srgbClr val="243A50"/>
+                </a:solidFill>
+                <a:latin typeface="Noto Sans CJK SC"/>
+              </a:defRPr>
+            </a:pPr>
+            <a:r>
+              <a:rPr>
+                <a:ea typeface="Noto Sans CJK SC"/>
+              </a:rPr>
+              <a:t>K(x,z)=⟨φ(x),φ(z)⟩ → 直接算内积，避免显式高维展开</a:t>
+            </a:r>
+          </a:p>
+        </p:txBody>
+      </p:sp>
+      <p:sp>
+        <p:nvSpPr>
+          <p:cNvPr id="9" name="TextBox 8"/>
+          <p:cNvSpPr txBox="1"/>
+          <p:nvPr/>
+        </p:nvSpPr>
+        <p:spPr>
+          <a:xfrm>
+            <a:off x="777240" y="3447288"/>
+            <a:ext cx="1280160" cy="594360"/>
+          </a:xfrm>
+          <a:prstGeom prst="rect">
+            <a:avLst/>
+          </a:prstGeom>
+          <a:noFill/>
+        </p:spPr>
+        <p:txBody>
+          <a:bodyPr wrap="square">
+            <a:spAutoFit/>
+          </a:bodyPr>
+          <a:lstStyle/>
+          <a:p>
+            <a:pPr>
+              <a:spcAft>
+                <a:spcPts val="1400"/>
+              </a:spcAft>
+              <a:defRPr sz="2500" b="1">
+                <a:solidFill>
+                  <a:srgbClr val="142F50"/>
+                </a:solidFill>
+                <a:latin typeface="Noto Sans CJK SC"/>
+              </a:defRPr>
+            </a:pPr>
+            <a:r>
+              <a:rPr>
+                <a:ea typeface="Noto Sans CJK SC"/>
+              </a:rPr>
+              <a:t>条件</a:t>
+            </a:r>
+          </a:p>
+        </p:txBody>
+      </p:sp>
+      <p:sp>
+        <p:nvSpPr>
+          <p:cNvPr id="10" name="TextBox 9"/>
+          <p:cNvSpPr txBox="1"/>
+          <p:nvPr/>
+        </p:nvSpPr>
+        <p:spPr>
+          <a:xfrm>
+            <a:off x="2194560" y="3447288"/>
+            <a:ext cx="11521440" cy="777240"/>
+          </a:xfrm>
+          <a:prstGeom prst="rect">
+            <a:avLst/>
+          </a:prstGeom>
+          <a:noFill/>
+        </p:spPr>
+        <p:txBody>
+          <a:bodyPr wrap="square">
+            <a:spAutoFit/>
+          </a:bodyPr>
+          <a:lstStyle/>
+          <a:p>
+            <a:pPr>
+              <a:spcAft>
+                <a:spcPts val="1400"/>
+              </a:spcAft>
+              <a:defRPr sz="2400" b="0">
+                <a:solidFill>
+                  <a:srgbClr val="243A50"/>
+                </a:solidFill>
+                <a:latin typeface="Noto Sans CJK SC"/>
+              </a:defRPr>
+            </a:pPr>
+            <a:r>
+              <a:rPr>
+                <a:ea typeface="Noto Sans CJK SC"/>
+              </a:rPr>
+              <a:t>对称 + 任意有限样本 Gram 矩阵半正定 → 合法内积核</a:t>
+            </a:r>
+          </a:p>
+        </p:txBody>
+      </p:sp>
+      <p:sp>
+        <p:nvSpPr>
+          <p:cNvPr id="11" name="TextBox 10"/>
+          <p:cNvSpPr txBox="1"/>
+          <p:nvPr/>
+        </p:nvSpPr>
+        <p:spPr>
+          <a:xfrm>
+            <a:off x="777240" y="4416552"/>
+            <a:ext cx="1280160" cy="594360"/>
+          </a:xfrm>
+          <a:prstGeom prst="rect">
+            <a:avLst/>
+          </a:prstGeom>
+          <a:noFill/>
+        </p:spPr>
+        <p:txBody>
+          <a:bodyPr wrap="square">
+            <a:spAutoFit/>
+          </a:bodyPr>
+          <a:lstStyle/>
+          <a:p>
+            <a:pPr>
+              <a:spcAft>
+                <a:spcPts val="1400"/>
+              </a:spcAft>
+              <a:defRPr sz="2500" b="1">
+                <a:solidFill>
+                  <a:srgbClr val="142F50"/>
+                </a:solidFill>
+                <a:latin typeface="Noto Sans CJK SC"/>
+              </a:defRPr>
+            </a:pPr>
+            <a:r>
+              <a:rPr>
+                <a:ea typeface="Noto Sans CJK SC"/>
+              </a:rPr>
+              <a:t>选择</a:t>
+            </a:r>
+          </a:p>
+        </p:txBody>
+      </p:sp>
+      <p:sp>
+        <p:nvSpPr>
+          <p:cNvPr id="12" name="TextBox 11"/>
+          <p:cNvSpPr txBox="1"/>
+          <p:nvPr/>
+        </p:nvSpPr>
+        <p:spPr>
+          <a:xfrm>
+            <a:off x="2194560" y="4416552"/>
+            <a:ext cx="11521440" cy="777240"/>
+          </a:xfrm>
+          <a:prstGeom prst="rect">
+            <a:avLst/>
+          </a:prstGeom>
+          <a:noFill/>
+        </p:spPr>
+        <p:txBody>
+          <a:bodyPr wrap="square">
+            <a:spAutoFit/>
+          </a:bodyPr>
+          <a:lstStyle/>
+          <a:p>
+            <a:pPr>
+              <a:spcAft>
+                <a:spcPts val="1400"/>
+              </a:spcAft>
+              <a:defRPr sz="2400" b="0">
+                <a:solidFill>
+                  <a:srgbClr val="243A50"/>
+                </a:solidFill>
+                <a:latin typeface="Noto Sans CJK SC"/>
+              </a:defRPr>
+            </a:pPr>
+            <a:r>
+              <a:rPr>
+                <a:ea typeface="Noto Sans CJK SC"/>
+              </a:rPr>
+              <a:t>多项式核表达有限阶交互；RBF 以距离定义局部相似性</a:t>
+            </a:r>
+          </a:p>
+        </p:txBody>
+      </p:sp>
+      <p:sp>
+        <p:nvSpPr>
+          <p:cNvPr id="13" name="TextBox 12"/>
+          <p:cNvSpPr txBox="1"/>
+          <p:nvPr/>
+        </p:nvSpPr>
+        <p:spPr>
+          <a:xfrm>
+            <a:off x="777240" y="5385816"/>
+            <a:ext cx="1280160" cy="594360"/>
+          </a:xfrm>
+          <a:prstGeom prst="rect">
+            <a:avLst/>
+          </a:prstGeom>
+          <a:noFill/>
+        </p:spPr>
+        <p:txBody>
+          <a:bodyPr wrap="square">
+            <a:spAutoFit/>
+          </a:bodyPr>
+          <a:lstStyle/>
+          <a:p>
+            <a:pPr>
+              <a:spcAft>
+                <a:spcPts val="1400"/>
+              </a:spcAft>
+              <a:defRPr sz="2500" b="1">
+                <a:solidFill>
+                  <a:srgbClr val="142F50"/>
+                </a:solidFill>
+                <a:latin typeface="Noto Sans CJK SC"/>
+              </a:defRPr>
+            </a:pPr>
+            <a:r>
+              <a:rPr>
+                <a:ea typeface="Noto Sans CJK SC"/>
+              </a:rPr>
+              <a:t>落地</a:t>
+            </a:r>
+          </a:p>
+        </p:txBody>
+      </p:sp>
+      <p:sp>
+        <p:nvSpPr>
+          <p:cNvPr id="14" name="TextBox 13"/>
+          <p:cNvSpPr txBox="1"/>
+          <p:nvPr/>
+        </p:nvSpPr>
+        <p:spPr>
+          <a:xfrm>
+            <a:off x="2194560" y="5385816"/>
+            <a:ext cx="11521440" cy="777240"/>
+          </a:xfrm>
+          <a:prstGeom prst="rect">
+            <a:avLst/>
+          </a:prstGeom>
+          <a:noFill/>
+        </p:spPr>
+        <p:txBody>
+          <a:bodyPr wrap="square">
+            <a:spAutoFit/>
+          </a:bodyPr>
+          <a:lstStyle/>
+          <a:p>
+            <a:pPr>
+              <a:spcAft>
+                <a:spcPts val="1400"/>
+              </a:spcAft>
+              <a:defRPr sz="2400" b="0">
+                <a:solidFill>
+                  <a:srgbClr val="243A50"/>
+                </a:solidFill>
+                <a:latin typeface="Noto Sans CJK SC"/>
+              </a:defRPr>
+            </a:pPr>
+            <a:r>
+              <a:rPr>
+                <a:ea typeface="Noto Sans CJK SC"/>
+              </a:rPr>
+              <a:t>标准化与交叉验证选参数；训练全对不代表泛化良好</a:t>
+            </a:r>
+          </a:p>
+        </p:txBody>
+      </p:sp>
+      <p:sp>
+        <p:nvSpPr>
+          <p:cNvPr id="15" name="TextBox 14"/>
+          <p:cNvSpPr txBox="1"/>
+          <p:nvPr/>
+        </p:nvSpPr>
+        <p:spPr>
+          <a:xfrm>
+            <a:off x="777240" y="6748272"/>
+            <a:ext cx="13258800" cy="685800"/>
+          </a:xfrm>
+          <a:prstGeom prst="rect">
+            <a:avLst/>
+          </a:prstGeom>
+          <a:noFill/>
+        </p:spPr>
+        <p:txBody>
+          <a:bodyPr wrap="square">
+            <a:spAutoFit/>
+          </a:bodyPr>
+          <a:lstStyle/>
+          <a:p>
+            <a:pPr>
+              <a:spcAft>
+                <a:spcPts val="1400"/>
+              </a:spcAft>
+              <a:defRPr sz="2300" b="1">
+                <a:solidFill>
+                  <a:srgbClr val="142F50"/>
+                </a:solidFill>
+                <a:latin typeface="Noto Sans CJK SC"/>
+              </a:defRPr>
+            </a:pPr>
+            <a:r>
+              <a:rPr>
+                <a:ea typeface="Noto Sans CJK SC"/>
+              </a:rPr>
+              <a:t>课后：独立展开二次核；解释 γ 与 σ 的关系；举一个非半正定反例。</a:t>
+            </a:r>
+          </a:p>
+        </p:txBody>
+      </p:sp>
+      <p:sp>
+        <p:nvSpPr>
+          <p:cNvPr id="16" name="TextBox 15"/>
+          <p:cNvSpPr txBox="1"/>
+          <p:nvPr/>
+        </p:nvSpPr>
+        <p:spPr>
+          <a:xfrm>
+            <a:off x="13487400" y="7708392"/>
+            <a:ext cx="777240" cy="320040"/>
+          </a:xfrm>
+          <a:prstGeom prst="rect">
+            <a:avLst/>
+          </a:prstGeom>
+          <a:noFill/>
+        </p:spPr>
+        <p:txBody>
+          <a:bodyPr wrap="square">
+            <a:spAutoFit/>
+          </a:bodyPr>
+          <a:lstStyle/>
+          <a:p>
+            <a:pPr>
+              <a:spcAft>
+                <a:spcPts val="1400"/>
+              </a:spcAft>
+              <a:defRPr sz="1200" b="0">
+                <a:solidFill>
+                  <a:srgbClr val="60758A"/>
+                </a:solidFill>
+                <a:latin typeface="Noto Sans CJK SC"/>
+              </a:defRPr>
+            </a:pPr>
+            <a:r>
+              <a:rPr>
+                <a:ea typeface="Noto Sans CJK SC"/>
+              </a:rPr>
+              <a:t>25 / 25</a:t>
+            </a:r>
           </a:p>
         </p:txBody>
       </p:sp>
@@ -21948,7 +24214,7 @@
               <a:rPr>
                 <a:ea typeface="微软雅黑" panose="020B0503020204020204" charset="-122"/>
               </a:rPr>
-              <a:t>03 / 22</a:t>
+              <a:t>05 / 25</a:t>
             </a:r>
             <a:endParaRPr>
               <a:ea typeface="微软雅黑" panose="020B0503020204020204" charset="-122"/>
@@ -24541,7 +26807,7 @@
               <a:rPr>
                 <a:ea typeface="微软雅黑" panose="020B0503020204020204" charset="-122"/>
               </a:rPr>
-              <a:t>04 / 22</a:t>
+              <a:t>06 / 25</a:t>
             </a:r>
             <a:endParaRPr>
               <a:ea typeface="微软雅黑" panose="020B0503020204020204" charset="-122"/>
@@ -25099,7 +27365,7 @@
               <a:rPr>
                 <a:ea typeface="微软雅黑" panose="020B0503020204020204" charset="-122"/>
               </a:rPr>
-              <a:t>05 / 22</a:t>
+              <a:t>07 / 25</a:t>
             </a:r>
             <a:endParaRPr>
               <a:ea typeface="微软雅黑" panose="020B0503020204020204" charset="-122"/>
@@ -25369,7 +27635,7 @@
               <a:rPr>
                 <a:ea typeface="微软雅黑" panose="020B0503020204020204" charset="-122"/>
               </a:rPr>
-              <a:t>06 / 22</a:t>
+              <a:t>08 / 25</a:t>
             </a:r>
             <a:endParaRPr>
               <a:ea typeface="微软雅黑" panose="020B0503020204020204" charset="-122"/>
@@ -27032,7 +29298,7 @@
               <a:rPr>
                 <a:ea typeface="微软雅黑" panose="020B0503020204020204" charset="-122"/>
               </a:rPr>
-              <a:t>07 / 22</a:t>
+              <a:t>09 / 25</a:t>
             </a:r>
             <a:endParaRPr>
               <a:ea typeface="微软雅黑" panose="020B0503020204020204" charset="-122"/>
@@ -27590,7 +29856,7 @@
               <a:rPr>
                 <a:ea typeface="微软雅黑" panose="020B0503020204020204" charset="-122"/>
               </a:rPr>
-              <a:t>08 / 22</a:t>
+              <a:t>10 / 25</a:t>
             </a:r>
             <a:endParaRPr>
               <a:ea typeface="微软雅黑" panose="020B0503020204020204" charset="-122"/>
@@ -28148,7 +30414,7 @@
               <a:rPr>
                 <a:ea typeface="微软雅黑" panose="020B0503020204020204" charset="-122"/>
               </a:rPr>
-              <a:t>09 / 22</a:t>
+              <a:t>11 / 25</a:t>
             </a:r>
             <a:endParaRPr>
               <a:ea typeface="微软雅黑" panose="020B0503020204020204" charset="-122"/>
